--- a/posts/separation-vector/scriptR.pptx
+++ b/posts/separation-vector/scriptR.pptx
@@ -6,6 +6,10 @@
   </p:sldMasterIdLst>
   <p:sldIdLst>
     <p:sldId id="256" r:id="rId2"/>
+    <p:sldId id="259" r:id="rId3"/>
+    <p:sldId id="257" r:id="rId4"/>
+    <p:sldId id="260" r:id="rId5"/>
+    <p:sldId id="261" r:id="rId6"/>
   </p:sldIdLst>
   <p:sldSz cx="12192000" cy="6858000"/>
   <p:notesSz cx="6858000" cy="9144000"/>
@@ -104,6 +108,11 @@
       </a:defRPr>
     </a:lvl9pPr>
   </p:defaultTextStyle>
+  <p:extLst>
+    <p:ext uri="{EFAFB233-063F-42B5-8137-9DF3F51BA10A}">
+      <p15:sldGuideLst xmlns:p15="http://schemas.microsoft.com/office/powerpoint/2012/main"/>
+    </p:ext>
+  </p:extLst>
 </p:presentation>
 </file>
 
@@ -3321,6 +3330,251 @@
           <a:chExt cx="0" cy="0"/>
         </a:xfrm>
       </p:grpSpPr>
+      <p:pic>
+        <p:nvPicPr>
+          <p:cNvPr id="2" name="Picture 2">
+            <a:extLst>
+              <a:ext uri="{FF2B5EF4-FFF2-40B4-BE49-F238E27FC236}">
+                <a16:creationId xmlns:a16="http://schemas.microsoft.com/office/drawing/2014/main" id="{5383C4E5-1645-7A11-DAB2-663F5C7BFBFC}"/>
+              </a:ext>
+            </a:extLst>
+          </p:cNvPr>
+          <p:cNvPicPr>
+            <a:picLocks noChangeAspect="1" noChangeArrowheads="1"/>
+          </p:cNvPicPr>
+          <p:nvPr/>
+        </p:nvPicPr>
+        <p:blipFill>
+          <a:blip r:embed="rId2">
+            <a:extLst>
+              <a:ext uri="{28A0092B-C50C-407E-A947-70E740481C1C}">
+                <a14:useLocalDpi xmlns:a14="http://schemas.microsoft.com/office/drawing/2010/main" val="0"/>
+              </a:ext>
+            </a:extLst>
+          </a:blip>
+          <a:srcRect/>
+          <a:stretch>
+            <a:fillRect/>
+          </a:stretch>
+        </p:blipFill>
+        <p:spPr bwMode="auto">
+          <a:xfrm>
+            <a:off x="2422525" y="0"/>
+            <a:ext cx="7345363" cy="6858000"/>
+          </a:xfrm>
+          <a:prstGeom prst="rect">
+            <a:avLst/>
+          </a:prstGeom>
+          <a:noFill/>
+          <a:extLst>
+            <a:ext uri="{909E8E84-426E-40DD-AFC4-6F175D3DCCD1}">
+              <a14:hiddenFill xmlns:a14="http://schemas.microsoft.com/office/drawing/2010/main">
+                <a:solidFill>
+                  <a:srgbClr val="FFFFFF"/>
+                </a:solidFill>
+              </a14:hiddenFill>
+            </a:ext>
+          </a:extLst>
+        </p:spPr>
+      </p:pic>
+    </p:spTree>
+    <p:extLst>
+      <p:ext uri="{BB962C8B-B14F-4D97-AF65-F5344CB8AC3E}">
+        <p14:creationId xmlns:p14="http://schemas.microsoft.com/office/powerpoint/2010/main" val="1610379996"/>
+      </p:ext>
+    </p:extLst>
+  </p:cSld>
+  <p:clrMapOvr>
+    <a:masterClrMapping/>
+  </p:clrMapOvr>
+</p:sld>
+</file>
+
+<file path=ppt/slides/slide2.xml><?xml version="1.0" encoding="utf-8"?>
+<p:sld xmlns:a="http://schemas.openxmlformats.org/drawingml/2006/main" xmlns:r="http://schemas.openxmlformats.org/officeDocument/2006/relationships" xmlns:p="http://schemas.openxmlformats.org/presentationml/2006/main">
+  <p:cSld>
+    <p:spTree>
+      <p:nvGrpSpPr>
+        <p:cNvPr id="1" name=""/>
+        <p:cNvGrpSpPr/>
+        <p:nvPr/>
+      </p:nvGrpSpPr>
+      <p:grpSpPr>
+        <a:xfrm>
+          <a:off x="0" y="0"/>
+          <a:ext cx="0" cy="0"/>
+          <a:chOff x="0" y="0"/>
+          <a:chExt cx="0" cy="0"/>
+        </a:xfrm>
+      </p:grpSpPr>
+      <p:pic>
+        <p:nvPicPr>
+          <p:cNvPr id="2" name="Picture 2">
+            <a:extLst>
+              <a:ext uri="{FF2B5EF4-FFF2-40B4-BE49-F238E27FC236}">
+                <a16:creationId xmlns:a16="http://schemas.microsoft.com/office/drawing/2014/main" id="{5383C4E5-1645-7A11-DAB2-663F5C7BFBFC}"/>
+              </a:ext>
+            </a:extLst>
+          </p:cNvPr>
+          <p:cNvPicPr>
+            <a:picLocks noChangeAspect="1" noChangeArrowheads="1"/>
+          </p:cNvPicPr>
+          <p:nvPr/>
+        </p:nvPicPr>
+        <p:blipFill>
+          <a:blip r:embed="rId2">
+            <a:duotone>
+              <a:schemeClr val="accent1">
+                <a:shade val="45000"/>
+                <a:satMod val="135000"/>
+              </a:schemeClr>
+              <a:prstClr val="white"/>
+            </a:duotone>
+            <a:extLst>
+              <a:ext uri="{28A0092B-C50C-407E-A947-70E740481C1C}">
+                <a14:useLocalDpi xmlns:a14="http://schemas.microsoft.com/office/drawing/2010/main" val="0"/>
+              </a:ext>
+            </a:extLst>
+          </a:blip>
+          <a:srcRect/>
+          <a:stretch>
+            <a:fillRect/>
+          </a:stretch>
+        </p:blipFill>
+        <p:spPr bwMode="auto">
+          <a:xfrm>
+            <a:off x="2422525" y="0"/>
+            <a:ext cx="7345363" cy="6858000"/>
+          </a:xfrm>
+          <a:prstGeom prst="rect">
+            <a:avLst/>
+          </a:prstGeom>
+          <a:noFill/>
+          <a:extLst>
+            <a:ext uri="{909E8E84-426E-40DD-AFC4-6F175D3DCCD1}">
+              <a14:hiddenFill xmlns:a14="http://schemas.microsoft.com/office/drawing/2010/main">
+                <a:solidFill>
+                  <a:srgbClr val="FFFFFF"/>
+                </a:solidFill>
+              </a14:hiddenFill>
+            </a:ext>
+          </a:extLst>
+        </p:spPr>
+      </p:pic>
+    </p:spTree>
+    <p:extLst>
+      <p:ext uri="{BB962C8B-B14F-4D97-AF65-F5344CB8AC3E}">
+        <p14:creationId xmlns:p14="http://schemas.microsoft.com/office/powerpoint/2010/main" val="2438198375"/>
+      </p:ext>
+    </p:extLst>
+  </p:cSld>
+  <p:clrMapOvr>
+    <a:masterClrMapping/>
+  </p:clrMapOvr>
+</p:sld>
+</file>
+
+<file path=ppt/slides/slide3.xml><?xml version="1.0" encoding="utf-8"?>
+<p:sld xmlns:a="http://schemas.openxmlformats.org/drawingml/2006/main" xmlns:r="http://schemas.openxmlformats.org/officeDocument/2006/relationships" xmlns:p="http://schemas.openxmlformats.org/presentationml/2006/main">
+  <p:cSld>
+    <p:spTree>
+      <p:nvGrpSpPr>
+        <p:cNvPr id="1" name=""/>
+        <p:cNvGrpSpPr/>
+        <p:nvPr/>
+      </p:nvGrpSpPr>
+      <p:grpSpPr>
+        <a:xfrm>
+          <a:off x="0" y="0"/>
+          <a:ext cx="0" cy="0"/>
+          <a:chOff x="0" y="0"/>
+          <a:chExt cx="0" cy="0"/>
+        </a:xfrm>
+      </p:grpSpPr>
+      <p:pic>
+        <p:nvPicPr>
+          <p:cNvPr id="1026" name="Picture 2">
+            <a:extLst>
+              <a:ext uri="{FF2B5EF4-FFF2-40B4-BE49-F238E27FC236}">
+                <a16:creationId xmlns:a16="http://schemas.microsoft.com/office/drawing/2014/main" id="{59F90DC0-3B35-014B-AB4E-C8BBF6A855AB}"/>
+              </a:ext>
+            </a:extLst>
+          </p:cNvPr>
+          <p:cNvPicPr>
+            <a:picLocks noChangeAspect="1" noChangeArrowheads="1"/>
+          </p:cNvPicPr>
+          <p:nvPr/>
+        </p:nvPicPr>
+        <p:blipFill>
+          <a:blip r:embed="rId2">
+            <a:duotone>
+              <a:schemeClr val="accent1">
+                <a:shade val="45000"/>
+                <a:satMod val="135000"/>
+              </a:schemeClr>
+              <a:prstClr val="white"/>
+            </a:duotone>
+            <a:extLst>
+              <a:ext uri="{28A0092B-C50C-407E-A947-70E740481C1C}">
+                <a14:useLocalDpi xmlns:a14="http://schemas.microsoft.com/office/drawing/2010/main" val="0"/>
+              </a:ext>
+            </a:extLst>
+          </a:blip>
+          <a:srcRect/>
+          <a:stretch>
+            <a:fillRect/>
+          </a:stretch>
+        </p:blipFill>
+        <p:spPr bwMode="auto">
+          <a:xfrm>
+            <a:off x="2314575" y="0"/>
+            <a:ext cx="7561263" cy="6858000"/>
+          </a:xfrm>
+          <a:prstGeom prst="rect">
+            <a:avLst/>
+          </a:prstGeom>
+          <a:noFill/>
+          <a:extLst>
+            <a:ext uri="{909E8E84-426E-40DD-AFC4-6F175D3DCCD1}">
+              <a14:hiddenFill xmlns:a14="http://schemas.microsoft.com/office/drawing/2010/main">
+                <a:solidFill>
+                  <a:srgbClr val="FFFFFF"/>
+                </a:solidFill>
+              </a14:hiddenFill>
+            </a:ext>
+          </a:extLst>
+        </p:spPr>
+      </p:pic>
+    </p:spTree>
+    <p:extLst>
+      <p:ext uri="{BB962C8B-B14F-4D97-AF65-F5344CB8AC3E}">
+        <p14:creationId xmlns:p14="http://schemas.microsoft.com/office/powerpoint/2010/main" val="950014501"/>
+      </p:ext>
+    </p:extLst>
+  </p:cSld>
+  <p:clrMapOvr>
+    <a:masterClrMapping/>
+  </p:clrMapOvr>
+</p:sld>
+</file>
+
+<file path=ppt/slides/slide4.xml><?xml version="1.0" encoding="utf-8"?>
+<p:sld xmlns:a="http://schemas.openxmlformats.org/drawingml/2006/main" xmlns:r="http://schemas.openxmlformats.org/officeDocument/2006/relationships" xmlns:p="http://schemas.openxmlformats.org/presentationml/2006/main">
+  <p:cSld>
+    <p:spTree>
+      <p:nvGrpSpPr>
+        <p:cNvPr id="1" name=""/>
+        <p:cNvGrpSpPr/>
+        <p:nvPr/>
+      </p:nvGrpSpPr>
+      <p:grpSpPr>
+        <a:xfrm>
+          <a:off x="0" y="0"/>
+          <a:ext cx="0" cy="0"/>
+          <a:chOff x="0" y="0"/>
+          <a:chExt cx="0" cy="0"/>
+        </a:xfrm>
+      </p:grpSpPr>
       <p:grpSp>
         <p:nvGrpSpPr>
           <p:cNvPr id="6" name="그룹 5">
@@ -3335,10 +3589,10 @@
         </p:nvGrpSpPr>
         <p:grpSpPr>
           <a:xfrm>
-            <a:off x="2314575" y="-1306011"/>
-            <a:ext cx="7561263" cy="8164011"/>
-            <a:chOff x="2314575" y="-1306011"/>
-            <a:chExt cx="7561263" cy="8164011"/>
+            <a:off x="2314575" y="-907426"/>
+            <a:ext cx="7561263" cy="7765426"/>
+            <a:chOff x="2314575" y="-907426"/>
+            <a:chExt cx="7561263" cy="7765426"/>
           </a:xfrm>
         </p:grpSpPr>
         <p:pic>
@@ -3404,7 +3658,7 @@
               </p:nvSpPr>
               <p:spPr>
                 <a:xfrm>
-                  <a:off x="5088617" y="-1306011"/>
+                  <a:off x="5393417" y="-907426"/>
                   <a:ext cx="4238264" cy="3835851"/>
                 </a:xfrm>
                 <a:prstGeom prst="rect">
@@ -3446,7 +3700,7 @@
                           <m:accPr>
                             <m:chr m:val="̂"/>
                             <m:ctrlPr>
-                              <a:rPr lang="en-US" altLang="ko-KR" sz="59500" b="0" i="1" smtClean="0">
+                              <a:rPr lang="en-US" altLang="ko-KR" sz="71400" b="0" i="1" smtClean="0">
                                 <a:solidFill>
                                   <a:schemeClr val="tx1"/>
                                 </a:solidFill>
@@ -3456,13 +3710,13 @@
                           </m:accPr>
                           <m:e>
                             <m:r>
-                              <a:rPr lang="en-US" altLang="ko-KR" sz="59500" b="0" i="1" smtClean="0">
+                              <a:rPr lang="en-US" altLang="ko-KR" sz="71400" b="0" i="1" smtClean="0">
                                 <a:solidFill>
                                   <a:schemeClr val="tx1"/>
                                 </a:solidFill>
                                 <a:latin typeface="Cambria Math" panose="02040503050406030204" pitchFamily="18" charset="0"/>
                               </a:rPr>
-                              <m:t>  </m:t>
+                              <m:t>    </m:t>
                             </m:r>
                           </m:e>
                         </m:acc>
@@ -3495,7 +3749,7 @@
               </p:nvSpPr>
               <p:spPr>
                 <a:xfrm>
-                  <a:off x="5088617" y="-1306011"/>
+                  <a:off x="5393417" y="-907426"/>
                   <a:ext cx="4238264" cy="3835851"/>
                 </a:xfrm>
                 <a:prstGeom prst="rect">
@@ -3504,7 +3758,7 @@
                 <a:blipFill>
                   <a:blip r:embed="rId3"/>
                   <a:stretch>
-                    <a:fillRect l="-17554" t="-14308"/>
+                    <a:fillRect l="-48489" t="-27663"/>
                   </a:stretch>
                 </a:blipFill>
                 <a:ln>
@@ -3530,7 +3784,250 @@
     </p:spTree>
     <p:extLst>
       <p:ext uri="{BB962C8B-B14F-4D97-AF65-F5344CB8AC3E}">
-        <p14:creationId xmlns:p14="http://schemas.microsoft.com/office/powerpoint/2010/main" val="1610379996"/>
+        <p14:creationId xmlns:p14="http://schemas.microsoft.com/office/powerpoint/2010/main" val="2097191494"/>
+      </p:ext>
+    </p:extLst>
+  </p:cSld>
+  <p:clrMapOvr>
+    <a:masterClrMapping/>
+  </p:clrMapOvr>
+</p:sld>
+</file>
+
+<file path=ppt/slides/slide5.xml><?xml version="1.0" encoding="utf-8"?>
+<p:sld xmlns:a="http://schemas.openxmlformats.org/drawingml/2006/main" xmlns:r="http://schemas.openxmlformats.org/officeDocument/2006/relationships" xmlns:p="http://schemas.openxmlformats.org/presentationml/2006/main">
+  <p:cSld>
+    <p:spTree>
+      <p:nvGrpSpPr>
+        <p:cNvPr id="1" name=""/>
+        <p:cNvGrpSpPr/>
+        <p:nvPr/>
+      </p:nvGrpSpPr>
+      <p:grpSpPr>
+        <a:xfrm>
+          <a:off x="0" y="0"/>
+          <a:ext cx="0" cy="0"/>
+          <a:chOff x="0" y="0"/>
+          <a:chExt cx="0" cy="0"/>
+        </a:xfrm>
+      </p:grpSpPr>
+      <p:grpSp>
+        <p:nvGrpSpPr>
+          <p:cNvPr id="6" name="그룹 5">
+            <a:extLst>
+              <a:ext uri="{FF2B5EF4-FFF2-40B4-BE49-F238E27FC236}">
+                <a16:creationId xmlns:a16="http://schemas.microsoft.com/office/drawing/2014/main" id="{E9A8A5F8-4D00-076B-94BC-16A7980014D3}"/>
+              </a:ext>
+            </a:extLst>
+          </p:cNvPr>
+          <p:cNvGrpSpPr/>
+          <p:nvPr/>
+        </p:nvGrpSpPr>
+        <p:grpSpPr>
+          <a:xfrm>
+            <a:off x="2314575" y="-907426"/>
+            <a:ext cx="7561263" cy="7765426"/>
+            <a:chOff x="2314575" y="-907426"/>
+            <a:chExt cx="7561263" cy="7765426"/>
+          </a:xfrm>
+        </p:grpSpPr>
+        <p:pic>
+          <p:nvPicPr>
+            <p:cNvPr id="1026" name="Picture 2">
+              <a:extLst>
+                <a:ext uri="{FF2B5EF4-FFF2-40B4-BE49-F238E27FC236}">
+                  <a16:creationId xmlns:a16="http://schemas.microsoft.com/office/drawing/2014/main" id="{59F90DC0-3B35-014B-AB4E-C8BBF6A855AB}"/>
+                </a:ext>
+              </a:extLst>
+            </p:cNvPr>
+            <p:cNvPicPr>
+              <a:picLocks noChangeAspect="1" noChangeArrowheads="1"/>
+            </p:cNvPicPr>
+            <p:nvPr/>
+          </p:nvPicPr>
+          <p:blipFill>
+            <a:blip r:embed="rId2">
+              <a:duotone>
+                <a:schemeClr val="accent1">
+                  <a:shade val="45000"/>
+                  <a:satMod val="135000"/>
+                </a:schemeClr>
+                <a:prstClr val="white"/>
+              </a:duotone>
+              <a:extLst>
+                <a:ext uri="{28A0092B-C50C-407E-A947-70E740481C1C}">
+                  <a14:useLocalDpi xmlns:a14="http://schemas.microsoft.com/office/drawing/2010/main" val="0"/>
+                </a:ext>
+              </a:extLst>
+            </a:blip>
+            <a:srcRect/>
+            <a:stretch>
+              <a:fillRect/>
+            </a:stretch>
+          </p:blipFill>
+          <p:spPr bwMode="auto">
+            <a:xfrm>
+              <a:off x="2314575" y="0"/>
+              <a:ext cx="7561263" cy="6858000"/>
+            </a:xfrm>
+            <a:prstGeom prst="rect">
+              <a:avLst/>
+            </a:prstGeom>
+            <a:noFill/>
+            <a:extLst>
+              <a:ext uri="{909E8E84-426E-40DD-AFC4-6F175D3DCCD1}">
+                <a14:hiddenFill xmlns:a14="http://schemas.microsoft.com/office/drawing/2010/main">
+                  <a:solidFill>
+                    <a:srgbClr val="FFFFFF"/>
+                  </a:solidFill>
+                </a14:hiddenFill>
+              </a:ext>
+            </a:extLst>
+          </p:spPr>
+        </p:pic>
+        <mc:AlternateContent xmlns:mc="http://schemas.openxmlformats.org/markup-compatibility/2006">
+          <mc:Choice xmlns:a14="http://schemas.microsoft.com/office/drawing/2010/main" Requires="a14">
+            <p:sp>
+              <p:nvSpPr>
+                <p:cNvPr id="4" name="직사각형 3">
+                  <a:extLst>
+                    <a:ext uri="{FF2B5EF4-FFF2-40B4-BE49-F238E27FC236}">
+                      <a16:creationId xmlns:a16="http://schemas.microsoft.com/office/drawing/2014/main" id="{C526728C-D5C7-5699-878E-621AB768AEEF}"/>
+                    </a:ext>
+                  </a:extLst>
+                </p:cNvPr>
+                <p:cNvSpPr/>
+                <p:nvPr/>
+              </p:nvSpPr>
+              <p:spPr>
+                <a:xfrm>
+                  <a:off x="5393417" y="-907426"/>
+                  <a:ext cx="4238264" cy="3835851"/>
+                </a:xfrm>
+                <a:prstGeom prst="rect">
+                  <a:avLst/>
+                </a:prstGeom>
+                <a:noFill/>
+                <a:ln>
+                  <a:noFill/>
+                </a:ln>
+              </p:spPr>
+              <p:style>
+                <a:lnRef idx="2">
+                  <a:schemeClr val="accent1">
+                    <a:shade val="50000"/>
+                  </a:schemeClr>
+                </a:lnRef>
+                <a:fillRef idx="1">
+                  <a:schemeClr val="accent1"/>
+                </a:fillRef>
+                <a:effectRef idx="0">
+                  <a:schemeClr val="accent1"/>
+                </a:effectRef>
+                <a:fontRef idx="minor">
+                  <a:schemeClr val="lt1"/>
+                </a:fontRef>
+              </p:style>
+              <p:txBody>
+                <a:bodyPr rtlCol="0" anchor="ctr"/>
+                <a:lstStyle/>
+                <a:p>
+                  <a:pPr algn="ctr"/>
+                  <a14:m>
+                    <m:oMathPara xmlns:m="http://schemas.openxmlformats.org/officeDocument/2006/math">
+                      <m:oMathParaPr>
+                        <m:jc m:val="centerGroup"/>
+                      </m:oMathParaPr>
+                      <m:oMath xmlns:m="http://schemas.openxmlformats.org/officeDocument/2006/math">
+                        <m:acc>
+                          <m:accPr>
+                            <m:chr m:val="̂"/>
+                            <m:ctrlPr>
+                              <a:rPr lang="en-US" altLang="ko-KR" sz="71400" b="0" i="1" smtClean="0">
+                                <a:solidFill>
+                                  <a:srgbClr val="3960A6"/>
+                                </a:solidFill>
+                                <a:latin typeface="Cambria Math" panose="02040503050406030204" pitchFamily="18" charset="0"/>
+                              </a:rPr>
+                            </m:ctrlPr>
+                          </m:accPr>
+                          <m:e>
+                            <m:r>
+                              <a:rPr lang="en-US" altLang="ko-KR" sz="71400" b="0" i="1" smtClean="0">
+                                <a:solidFill>
+                                  <a:srgbClr val="3960A6"/>
+                                </a:solidFill>
+                                <a:latin typeface="Cambria Math" panose="02040503050406030204" pitchFamily="18" charset="0"/>
+                              </a:rPr>
+                              <m:t>    </m:t>
+                            </m:r>
+                          </m:e>
+                        </m:acc>
+                      </m:oMath>
+                    </m:oMathPara>
+                  </a14:m>
+                  <a:endParaRPr lang="ko-KR" altLang="en-US" sz="59500" dirty="0">
+                    <a:solidFill>
+                      <a:srgbClr val="3960A6"/>
+                    </a:solidFill>
+                  </a:endParaRPr>
+                </a:p>
+              </p:txBody>
+            </p:sp>
+          </mc:Choice>
+          <mc:Fallback>
+            <p:sp>
+              <p:nvSpPr>
+                <p:cNvPr id="4" name="직사각형 3">
+                  <a:extLst>
+                    <a:ext uri="{FF2B5EF4-FFF2-40B4-BE49-F238E27FC236}">
+                      <a16:creationId xmlns:a16="http://schemas.microsoft.com/office/drawing/2014/main" id="{C526728C-D5C7-5699-878E-621AB768AEEF}"/>
+                    </a:ext>
+                  </a:extLst>
+                </p:cNvPr>
+                <p:cNvSpPr>
+                  <a:spLocks noRot="1" noChangeAspect="1" noMove="1" noResize="1" noEditPoints="1" noAdjustHandles="1" noChangeArrowheads="1" noChangeShapeType="1" noTextEdit="1"/>
+                </p:cNvSpPr>
+                <p:nvPr/>
+              </p:nvSpPr>
+              <p:spPr>
+                <a:xfrm>
+                  <a:off x="5393417" y="-907426"/>
+                  <a:ext cx="4238264" cy="3835851"/>
+                </a:xfrm>
+                <a:prstGeom prst="rect">
+                  <a:avLst/>
+                </a:prstGeom>
+                <a:blipFill>
+                  <a:blip r:embed="rId3"/>
+                  <a:stretch>
+                    <a:fillRect l="-48489" t="-27663"/>
+                  </a:stretch>
+                </a:blipFill>
+                <a:ln>
+                  <a:noFill/>
+                </a:ln>
+              </p:spPr>
+              <p:txBody>
+                <a:bodyPr/>
+                <a:lstStyle/>
+                <a:p>
+                  <a:r>
+                    <a:rPr lang="ko-KR" altLang="en-US">
+                      <a:noFill/>
+                    </a:rPr>
+                    <a:t> </a:t>
+                  </a:r>
+                </a:p>
+              </p:txBody>
+            </p:sp>
+          </mc:Fallback>
+        </mc:AlternateContent>
+      </p:grpSp>
+    </p:spTree>
+    <p:extLst>
+      <p:ext uri="{BB962C8B-B14F-4D97-AF65-F5344CB8AC3E}">
+        <p14:creationId xmlns:p14="http://schemas.microsoft.com/office/powerpoint/2010/main" val="3225183860"/>
       </p:ext>
     </p:extLst>
   </p:cSld>

--- a/posts/separation-vector/scriptR.pptx
+++ b/posts/separation-vector/scriptR.pptx
@@ -3443,7 +3443,7 @@
         </p:blipFill>
         <p:spPr bwMode="auto">
           <a:xfrm>
-            <a:off x="2422525" y="0"/>
+            <a:off x="2561421" y="0"/>
             <a:ext cx="7345363" cy="6858000"/>
           </a:xfrm>
           <a:prstGeom prst="rect">
@@ -3642,8 +3642,8 @@
             </a:extLst>
           </p:spPr>
         </p:pic>
-        <mc:AlternateContent xmlns:mc="http://schemas.openxmlformats.org/markup-compatibility/2006">
-          <mc:Choice xmlns:a14="http://schemas.microsoft.com/office/drawing/2010/main" Requires="a14">
+        <mc:AlternateContent xmlns:mc="http://schemas.openxmlformats.org/markup-compatibility/2006" xmlns:a14="http://schemas.microsoft.com/office/drawing/2010/main">
+          <mc:Choice Requires="a14">
             <p:sp>
               <p:nvSpPr>
                 <p:cNvPr id="4" name="직사각형 3">
@@ -3732,7 +3732,7 @@
               </p:txBody>
             </p:sp>
           </mc:Choice>
-          <mc:Fallback>
+          <mc:Fallback xmlns="">
             <p:sp>
               <p:nvSpPr>
                 <p:cNvPr id="4" name="직사각형 3">
@@ -3885,8 +3885,8 @@
             </a:extLst>
           </p:spPr>
         </p:pic>
-        <mc:AlternateContent xmlns:mc="http://schemas.openxmlformats.org/markup-compatibility/2006">
-          <mc:Choice xmlns:a14="http://schemas.microsoft.com/office/drawing/2010/main" Requires="a14">
+        <mc:AlternateContent xmlns:mc="http://schemas.openxmlformats.org/markup-compatibility/2006" xmlns:a14="http://schemas.microsoft.com/office/drawing/2010/main">
+          <mc:Choice Requires="a14">
             <p:sp>
               <p:nvSpPr>
                 <p:cNvPr id="4" name="직사각형 3">
@@ -3945,7 +3945,7 @@
                             <m:ctrlPr>
                               <a:rPr lang="en-US" altLang="ko-KR" sz="71400" b="0" i="1" smtClean="0">
                                 <a:solidFill>
-                                  <a:srgbClr val="3960A6"/>
+                                  <a:srgbClr val="203FA3"/>
                                 </a:solidFill>
                                 <a:latin typeface="Cambria Math" panose="02040503050406030204" pitchFamily="18" charset="0"/>
                               </a:rPr>
@@ -3955,7 +3955,7 @@
                             <m:r>
                               <a:rPr lang="en-US" altLang="ko-KR" sz="71400" b="0" i="1" smtClean="0">
                                 <a:solidFill>
-                                  <a:srgbClr val="3960A6"/>
+                                  <a:srgbClr val="203FA3"/>
                                 </a:solidFill>
                                 <a:latin typeface="Cambria Math" panose="02040503050406030204" pitchFamily="18" charset="0"/>
                               </a:rPr>
@@ -3968,14 +3968,14 @@
                   </a14:m>
                   <a:endParaRPr lang="ko-KR" altLang="en-US" sz="59500" dirty="0">
                     <a:solidFill>
-                      <a:srgbClr val="3960A6"/>
+                      <a:srgbClr val="203FA3"/>
                     </a:solidFill>
                   </a:endParaRPr>
                 </a:p>
               </p:txBody>
             </p:sp>
           </mc:Choice>
-          <mc:Fallback>
+          <mc:Fallback xmlns="">
             <p:sp>
               <p:nvSpPr>
                 <p:cNvPr id="4" name="직사각형 3">
@@ -4040,7 +4040,7 @@
 <file path=ppt/theme/theme1.xml><?xml version="1.0" encoding="utf-8"?>
 <a:theme xmlns:a="http://schemas.openxmlformats.org/drawingml/2006/main" name="Office 테마">
   <a:themeElements>
-    <a:clrScheme name="Office">
+    <a:clrScheme name="사용자 지정 1">
       <a:dk1>
         <a:sysClr val="windowText" lastClr="000000"/>
       </a:dk1>
@@ -4054,7 +4054,7 @@
         <a:srgbClr val="E7E6E6"/>
       </a:lt2>
       <a:accent1>
-        <a:srgbClr val="4472C4"/>
+        <a:srgbClr val="0E42B9"/>
       </a:accent1>
       <a:accent2>
         <a:srgbClr val="ED7D31"/>
